--- a/dist/초1/체육·보건·안전/생활안전/초1_체육·보건·안전_생활안전_01_등하굣길과놀이안전.pptx
+++ b/dist/초1/체육·보건·안전/생활안전/초1_체육·보건·안전_생활안전_01_등하굣길과놀이안전.pptx
@@ -120,13 +120,13 @@
   <p:extLst>
     <p:ext uri="{521415D9-36F7-43E2-AB2F-B90AF26B5E84}">
       <p14:sectionLst xmlns:p14="http://schemas.microsoft.com/office/powerpoint/2010/main">
-        <p14:section name="도입" id="{c80f4686-2b47-c5db-020c-4ed6c3689da2}">
+        <p14:section name="도입" id="{2373d88b-e9c9-87f4-65c2-1e0736f09732}">
           <p14:sldIdLst>
             <p14:sldId id="256"/>
             <p14:sldId id="257"/>
           </p14:sldIdLst>
         </p14:section>
-        <p14:section name="개념" id="{eda71ecb-8b41-8648-c18f-7bfc288feec4}">
+        <p14:section name="개념" id="{ee6113b8-8199-e4b4-2079-2d47dee28d82}">
           <p14:sldIdLst>
             <p14:sldId id="258"/>
             <p14:sldId id="261"/>
@@ -134,7 +134,7 @@
             <p14:sldId id="264"/>
           </p14:sldIdLst>
         </p14:section>
-        <p14:section name="연습" id="{386f8fa4-2a42-6f41-43b7-58b2d098a84d}">
+        <p14:section name="연습" id="{3692b8a0-00c1-f79f-ca30-809e3ded81b9}">
           <p14:sldIdLst>
             <p14:sldId id="259"/>
             <p14:sldId id="260"/>
@@ -142,30 +142,30 @@
             <p14:sldId id="265"/>
           </p14:sldIdLst>
         </p14:section>
-        <p14:section name="개념" id="{d486a769-5448-8066-cb17-a6973bc6cbc8}">
+        <p14:section name="개념" id="{08779103-4929-7586-a0fb-b72dfbd17616}">
           <p14:sldIdLst/>
         </p14:section>
-        <p14:section name="연습" id="{b27206a7-285b-1077-d17f-2006ec55a032}">
+        <p14:section name="연습" id="{e70fd1bb-39fc-31f8-50a7-2f41810a9b58}">
           <p14:sldIdLst/>
         </p14:section>
-        <p14:section name="개념" id="{2e2b70ec-8e0c-3200-dc47-12244c8db679}">
+        <p14:section name="개념" id="{3d15b51d-6208-859c-b90d-39499ce7844e}">
           <p14:sldIdLst/>
         </p14:section>
-        <p14:section name="연습" id="{d61d653f-7a3c-3cf0-ef9d-dbc177cb4722}">
+        <p14:section name="연습" id="{5c38e2cc-669e-9f82-8d15-2a8599a408f6}">
           <p14:sldIdLst/>
         </p14:section>
-        <p14:section name="확인" id="{8290a979-67ce-5731-111c-0cfe66498641}">
+        <p14:section name="확인" id="{c3d61444-737b-4627-57e0-be059ad2a852}">
           <p14:sldIdLst>
             <p14:sldId id="266"/>
             <p14:sldId id="267"/>
           </p14:sldIdLst>
         </p14:section>
-        <p14:section name="정리" id="{f41d8b55-5e61-3ad7-8475-fc4e07f4e31a}">
+        <p14:section name="정리" id="{292e94f5-0467-6b8d-ac03-d33003a593e0}">
           <p14:sldIdLst>
             <p14:sldId id="268"/>
           </p14:sldIdLst>
         </p14:section>
-        <p14:section name="보충" id="{46cf8eae-cea1-7ab1-24c5-40ef91b43a64}">
+        <p14:section name="보충" id="{5ceef1f3-0b35-a7bc-5158-8723c083f802}">
           <p14:sldIdLst>
             <p14:sldId id="269"/>
           </p14:sldIdLst>
@@ -3773,7 +3773,24 @@
                 <a:ea typeface="맑은 고딕" pitchFamily="34" charset="-122"/>
                 <a:cs typeface="맑은 고딕" pitchFamily="34" charset="-120"/>
               </a:rPr>
-              <a:t>횡단보도 건너기를 보여 줘요.</a:t>
+              <a:t>횡단보도 건너기를</a:t>
+            </a:r>
+            <a:endParaRPr lang="ko-KR" sz="3200" dirty="0"/>
+          </a:p>
+          <a:p>
+            <a:pPr eaLnBrk="0" algn="l" indent="0" marL="0">
+              <a:buNone/>
+            </a:pPr>
+            <a:r>
+              <a:rPr lang="ko-KR" altLang="en-US" sz="3200" dirty="0">
+                <a:solidFill>
+                  <a:srgbClr val="1F2937"/>
+                </a:solidFill>
+                <a:latin typeface="맑은 고딕" pitchFamily="34" charset="0"/>
+                <a:ea typeface="맑은 고딕" pitchFamily="34" charset="-122"/>
+                <a:cs typeface="맑은 고딕" pitchFamily="34" charset="-120"/>
+              </a:rPr>
+              <a:t>보여 줘요.</a:t>
             </a:r>
             <a:endParaRPr lang="ko-KR" sz="3200" dirty="0"/>
           </a:p>
@@ -3859,7 +3876,24 @@
                 <a:ea typeface="맑은 고딕" pitchFamily="34" charset="-122"/>
                 <a:cs typeface="맑은 고딕" pitchFamily="34" charset="-120"/>
               </a:rPr>
-              <a:t>그네 탈 때 약속은?</a:t>
+              <a:t>그네 탈 때</a:t>
+            </a:r>
+            <a:endParaRPr lang="ko-KR" sz="3200" dirty="0"/>
+          </a:p>
+          <a:p>
+            <a:pPr eaLnBrk="0" algn="l" indent="0" marL="0">
+              <a:buNone/>
+            </a:pPr>
+            <a:r>
+              <a:rPr lang="ko-KR" altLang="en-US" sz="3200" dirty="0">
+                <a:solidFill>
+                  <a:srgbClr val="1F2937"/>
+                </a:solidFill>
+                <a:latin typeface="맑은 고딕" pitchFamily="34" charset="0"/>
+                <a:ea typeface="맑은 고딕" pitchFamily="34" charset="-122"/>
+                <a:cs typeface="맑은 고딕" pitchFamily="34" charset="-120"/>
+              </a:rPr>
+              <a:t>약속은?</a:t>
             </a:r>
             <a:endParaRPr lang="ko-KR" sz="3200" dirty="0"/>
           </a:p>
@@ -3945,7 +3979,24 @@
                 <a:ea typeface="맑은 고딕" pitchFamily="34" charset="-122"/>
                 <a:cs typeface="맑은 고딕" pitchFamily="34" charset="-120"/>
               </a:rPr>
-              <a:t>모르는 사람이 따라오래요.</a:t>
+              <a:t>모르는 사람이</a:t>
+            </a:r>
+            <a:endParaRPr lang="ko-KR" sz="3200" dirty="0"/>
+          </a:p>
+          <a:p>
+            <a:pPr eaLnBrk="0" algn="l" indent="0" marL="0">
+              <a:buNone/>
+            </a:pPr>
+            <a:r>
+              <a:rPr lang="ko-KR" altLang="en-US" sz="3200" dirty="0">
+                <a:solidFill>
+                  <a:srgbClr val="1F2937"/>
+                </a:solidFill>
+                <a:latin typeface="맑은 고딕" pitchFamily="34" charset="0"/>
+                <a:ea typeface="맑은 고딕" pitchFamily="34" charset="-122"/>
+                <a:cs typeface="맑은 고딕" pitchFamily="34" charset="-120"/>
+              </a:rPr>
+              <a:t>따라오래요.</a:t>
             </a:r>
             <a:endParaRPr lang="ko-KR" sz="3200" dirty="0"/>
           </a:p>
@@ -4031,7 +4082,24 @@
                 <a:ea typeface="맑은 고딕" pitchFamily="34" charset="-122"/>
                 <a:cs typeface="맑은 고딕" pitchFamily="34" charset="-120"/>
               </a:rPr>
-              <a:t>불이 나면 몇 번에 전화해요?</a:t>
+              <a:t>불이 나면</a:t>
+            </a:r>
+            <a:endParaRPr lang="ko-KR" sz="3200" dirty="0"/>
+          </a:p>
+          <a:p>
+            <a:pPr eaLnBrk="0" algn="l" indent="0" marL="0">
+              <a:buNone/>
+            </a:pPr>
+            <a:r>
+              <a:rPr lang="ko-KR" altLang="en-US" sz="3200" dirty="0">
+                <a:solidFill>
+                  <a:srgbClr val="1F2937"/>
+                </a:solidFill>
+                <a:latin typeface="맑은 고딕" pitchFamily="34" charset="0"/>
+                <a:ea typeface="맑은 고딕" pitchFamily="34" charset="-122"/>
+                <a:cs typeface="맑은 고딕" pitchFamily="34" charset="-120"/>
+              </a:rPr>
+              <a:t>몇 번에 전화해요?</a:t>
             </a:r>
             <a:endParaRPr lang="ko-KR" sz="3200" dirty="0"/>
           </a:p>
@@ -6027,26 +6095,24 @@
       </p:sp>
       <p:sp>
         <p:nvSpPr>
-          <p:cNvPr id="7" name="S02-card7"/>
+          <p:cNvPr id="7" name="S02-figure7" descr="빨간 신호등 불"/>
           <p:cNvSpPr/>
           <p:nvPr/>
         </p:nvSpPr>
         <p:spPr>
           <a:xfrm>
-            <a:off x="548640" y="2715768"/>
-            <a:ext cx="5362956" cy="2404872"/>
-          </a:xfrm>
-          <a:prstGeom prst="roundRect">
-            <a:avLst>
-              <a:gd name="adj" fmla="val 4563"/>
-            </a:avLst>
+            <a:off x="2462923" y="2891548"/>
+            <a:ext cx="1534391" cy="1534391"/>
+          </a:xfrm>
+          <a:prstGeom prst="ellipse">
+            <a:avLst/>
           </a:prstGeom>
           <a:solidFill>
-            <a:srgbClr val="EAF3F1"/>
+            <a:srgbClr val="C8434E"/>
           </a:solidFill>
-          <a:ln w="12700">
+          <a:ln w="25400">
             <a:solidFill>
-              <a:srgbClr val="EAF3F1"/>
+              <a:srgbClr val="1F2937"/>
             </a:solidFill>
             <a:prstDash val="solid"/>
           </a:ln>
@@ -6054,14 +6120,14 @@
       </p:sp>
       <p:sp>
         <p:nvSpPr>
-          <p:cNvPr id="8" name="S02-cardtext8"/>
+          <p:cNvPr id="8" name="S02-label8"/>
           <p:cNvSpPr txBox="1"/>
           <p:nvPr/>
         </p:nvSpPr>
         <p:spPr>
           <a:xfrm>
-            <a:off x="822960" y="2852928"/>
-            <a:ext cx="4814316" cy="2130552"/>
+            <a:off x="548640" y="4674870"/>
+            <a:ext cx="5362956" cy="445770"/>
           </a:xfrm>
           <a:prstGeom prst="rect">
             <a:avLst/>
@@ -6073,14 +6139,11 @@
           <a:bodyPr wrap="square" lIns="0" tIns="0" rIns="0" bIns="0" rtlCol="0" anchor="ctr"/>
           <a:lstStyle/>
           <a:p>
-            <a:pPr eaLnBrk="0" indent="0" marL="0">
-              <a:spcAft>
-                <a:spcPts val="600"/>
-              </a:spcAft>
-              <a:buNone/>
-            </a:pPr>
-            <a:r>
-              <a:rPr lang="ko-KR" altLang="en-US" sz="3200" dirty="0">
+            <a:pPr eaLnBrk="0" algn="ctr" indent="0" marL="0">
+              <a:buNone/>
+            </a:pPr>
+            <a:r>
+              <a:rPr lang="ko-KR" altLang="en-US" sz="2600" b="1" dirty="0">
                 <a:solidFill>
                   <a:srgbClr val="1F2937"/>
                 </a:solidFill>
@@ -6090,7 +6153,7 @@
               </a:rPr>
               <a:t>빨간불</a:t>
             </a:r>
-            <a:endParaRPr lang="ko-KR" sz="3200" dirty="0"/>
+            <a:endParaRPr lang="ko-KR" sz="2600" dirty="0"/>
           </a:p>
         </p:txBody>
       </p:sp>
@@ -6143,26 +6206,24 @@
       </p:sp>
       <p:sp>
         <p:nvSpPr>
-          <p:cNvPr id="10" name="S02-card10"/>
+          <p:cNvPr id="10" name="S02-figure10" descr="초록 신호등 불"/>
           <p:cNvSpPr/>
           <p:nvPr/>
         </p:nvSpPr>
         <p:spPr>
           <a:xfrm>
-            <a:off x="6277356" y="2715768"/>
-            <a:ext cx="5362956" cy="2404872"/>
-          </a:xfrm>
-          <a:prstGeom prst="roundRect">
-            <a:avLst>
-              <a:gd name="adj" fmla="val 4563"/>
-            </a:avLst>
+            <a:off x="8191639" y="2891548"/>
+            <a:ext cx="1534391" cy="1534391"/>
+          </a:xfrm>
+          <a:prstGeom prst="ellipse">
+            <a:avLst/>
           </a:prstGeom>
           <a:solidFill>
-            <a:srgbClr val="EAF3F1"/>
+            <a:srgbClr val="2A9D8F"/>
           </a:solidFill>
-          <a:ln w="12700">
+          <a:ln w="25400">
             <a:solidFill>
-              <a:srgbClr val="EAF3F1"/>
+              <a:srgbClr val="1F2937"/>
             </a:solidFill>
             <a:prstDash val="solid"/>
           </a:ln>
@@ -6170,14 +6231,14 @@
       </p:sp>
       <p:sp>
         <p:nvSpPr>
-          <p:cNvPr id="11" name="S02-cardtext11"/>
+          <p:cNvPr id="11" name="S02-label11"/>
           <p:cNvSpPr txBox="1"/>
           <p:nvPr/>
         </p:nvSpPr>
         <p:spPr>
           <a:xfrm>
-            <a:off x="6551676" y="2852928"/>
-            <a:ext cx="4814316" cy="2130552"/>
+            <a:off x="6277356" y="4674870"/>
+            <a:ext cx="5362956" cy="445770"/>
           </a:xfrm>
           <a:prstGeom prst="rect">
             <a:avLst/>
@@ -6189,14 +6250,11 @@
           <a:bodyPr wrap="square" lIns="0" tIns="0" rIns="0" bIns="0" rtlCol="0" anchor="ctr"/>
           <a:lstStyle/>
           <a:p>
-            <a:pPr eaLnBrk="0" indent="0" marL="0">
-              <a:spcAft>
-                <a:spcPts val="600"/>
-              </a:spcAft>
-              <a:buNone/>
-            </a:pPr>
-            <a:r>
-              <a:rPr lang="ko-KR" altLang="en-US" sz="3200" dirty="0">
+            <a:pPr eaLnBrk="0" algn="ctr" indent="0" marL="0">
+              <a:buNone/>
+            </a:pPr>
+            <a:r>
+              <a:rPr lang="ko-KR" altLang="en-US" sz="2600" b="1" dirty="0">
                 <a:solidFill>
                   <a:srgbClr val="1F2937"/>
                 </a:solidFill>
@@ -6206,7 +6264,7 @@
               </a:rPr>
               <a:t>초록불</a:t>
             </a:r>
-            <a:endParaRPr lang="ko-KR" sz="3200" dirty="0"/>
+            <a:endParaRPr lang="ko-KR" sz="2600" dirty="0"/>
           </a:p>
         </p:txBody>
       </p:sp>
